--- a/examples/pptx-charts/charts-example.pptx
+++ b/examples/pptx-charts/charts-example.pptx
@@ -42,14 +42,50 @@
           <c:tx>
             <c:v>North</c:v>
           </c:tx>
+          <c:spPr>
+            <a:solidFill>
+              <a:srgbClr val="4472C4"/>
+            </a:solidFill>
+          </c:spPr>
           <c:cat>
             <c:strRef>
               <c:f>Sheet1!$A$2:$A$5</c:f>
+              <c:strCache>
+                <c:ptCount val="4"/>
+                <c:pt idx="0">
+                  <c:v>Q1</c:v>
+                </c:pt>
+                <c:pt idx="1">
+                  <c:v>Q2</c:v>
+                </c:pt>
+                <c:pt idx="2">
+                  <c:v>Q3</c:v>
+                </c:pt>
+                <c:pt idx="3">
+                  <c:v>Q4</c:v>
+                </c:pt>
+              </c:strCache>
             </c:strRef>
           </c:cat>
           <c:val>
             <c:numRef>
               <c:f>Sheet1!$B$2:$B$5</c:f>
+              <c:numCache>
+                <c:formatCode>General</c:formatCode>
+                <c:ptCount val="4"/>
+                <c:pt idx="0">
+                  <c:v>120</c:v>
+                </c:pt>
+                <c:pt idx="1">
+                  <c:v>150</c:v>
+                </c:pt>
+                <c:pt idx="2">
+                  <c:v>180</c:v>
+                </c:pt>
+                <c:pt idx="3">
+                  <c:v>200</c:v>
+                </c:pt>
+              </c:numCache>
             </c:numRef>
           </c:val>
         </c:ser>
@@ -59,14 +95,50 @@
           <c:tx>
             <c:v>South</c:v>
           </c:tx>
+          <c:spPr>
+            <a:solidFill>
+              <a:srgbClr val="ED7D31"/>
+            </a:solidFill>
+          </c:spPr>
           <c:cat>
             <c:strRef>
               <c:f>Sheet1!$A$2:$A$5</c:f>
+              <c:strCache>
+                <c:ptCount val="4"/>
+                <c:pt idx="0">
+                  <c:v>Q1</c:v>
+                </c:pt>
+                <c:pt idx="1">
+                  <c:v>Q2</c:v>
+                </c:pt>
+                <c:pt idx="2">
+                  <c:v>Q3</c:v>
+                </c:pt>
+                <c:pt idx="3">
+                  <c:v>Q4</c:v>
+                </c:pt>
+              </c:strCache>
             </c:strRef>
           </c:cat>
           <c:val>
             <c:numRef>
               <c:f>Sheet1!$C$2:$C$5</c:f>
+              <c:numCache>
+                <c:formatCode>General</c:formatCode>
+                <c:ptCount val="4"/>
+                <c:pt idx="0">
+                  <c:v>100</c:v>
+                </c:pt>
+                <c:pt idx="1">
+                  <c:v>130</c:v>
+                </c:pt>
+                <c:pt idx="2">
+                  <c:v>160</c:v>
+                </c:pt>
+                <c:pt idx="3">
+                  <c:v>190</c:v>
+                </c:pt>
+              </c:numCache>
             </c:numRef>
           </c:val>
         </c:ser>
@@ -76,14 +148,50 @@
           <c:tx>
             <c:v>East</c:v>
           </c:tx>
+          <c:spPr>
+            <a:solidFill>
+              <a:srgbClr val="A5A5A5"/>
+            </a:solidFill>
+          </c:spPr>
           <c:cat>
             <c:strRef>
               <c:f>Sheet1!$A$2:$A$5</c:f>
+              <c:strCache>
+                <c:ptCount val="4"/>
+                <c:pt idx="0">
+                  <c:v>Q1</c:v>
+                </c:pt>
+                <c:pt idx="1">
+                  <c:v>Q2</c:v>
+                </c:pt>
+                <c:pt idx="2">
+                  <c:v>Q3</c:v>
+                </c:pt>
+                <c:pt idx="3">
+                  <c:v>Q4</c:v>
+                </c:pt>
+              </c:strCache>
             </c:strRef>
           </c:cat>
           <c:val>
             <c:numRef>
               <c:f>Sheet1!$D$2:$D$5</c:f>
+              <c:numCache>
+                <c:formatCode>General</c:formatCode>
+                <c:ptCount val="4"/>
+                <c:pt idx="0">
+                  <c:v>80</c:v>
+                </c:pt>
+                <c:pt idx="1">
+                  <c:v>110</c:v>
+                </c:pt>
+                <c:pt idx="2">
+                  <c:v>140</c:v>
+                </c:pt>
+                <c:pt idx="3">
+                  <c:v>170</c:v>
+                </c:pt>
+              </c:numCache>
             </c:numRef>
           </c:val>
         </c:ser>
@@ -140,14 +248,100 @@
           <c:tx>
             <c:v>New York</c:v>
           </c:tx>
+          <c:spPr>
+            <a:ln w="28575">
+              <a:solidFill>
+                <a:srgbClr val="4472C4"/>
+              </a:solidFill>
+            </a:ln>
+          </c:spPr>
           <c:cat>
             <c:strRef>
               <c:f>Sheet1!$A$2:$A$13</c:f>
+              <c:strCache>
+                <c:ptCount val="12"/>
+                <c:pt idx="0">
+                  <c:v>Jan</c:v>
+                </c:pt>
+                <c:pt idx="1">
+                  <c:v>Feb</c:v>
+                </c:pt>
+                <c:pt idx="2">
+                  <c:v>Mar</c:v>
+                </c:pt>
+                <c:pt idx="3">
+                  <c:v>Apr</c:v>
+                </c:pt>
+                <c:pt idx="4">
+                  <c:v>May</c:v>
+                </c:pt>
+                <c:pt idx="5">
+                  <c:v>Jun</c:v>
+                </c:pt>
+                <c:pt idx="6">
+                  <c:v>Jul</c:v>
+                </c:pt>
+                <c:pt idx="7">
+                  <c:v>Aug</c:v>
+                </c:pt>
+                <c:pt idx="8">
+                  <c:v>Sep</c:v>
+                </c:pt>
+                <c:pt idx="9">
+                  <c:v>Oct</c:v>
+                </c:pt>
+                <c:pt idx="10">
+                  <c:v>Nov</c:v>
+                </c:pt>
+                <c:pt idx="11">
+                  <c:v>Dec</c:v>
+                </c:pt>
+              </c:strCache>
             </c:strRef>
           </c:cat>
           <c:val>
             <c:numRef>
               <c:f>Sheet1!$B$2:$B$13</c:f>
+              <c:numCache>
+                <c:formatCode>General</c:formatCode>
+                <c:ptCount val="12"/>
+                <c:pt idx="0">
+                  <c:v>32</c:v>
+                </c:pt>
+                <c:pt idx="1">
+                  <c:v>35</c:v>
+                </c:pt>
+                <c:pt idx="2">
+                  <c:v>45</c:v>
+                </c:pt>
+                <c:pt idx="3">
+                  <c:v>56</c:v>
+                </c:pt>
+                <c:pt idx="4">
+                  <c:v>67</c:v>
+                </c:pt>
+                <c:pt idx="5">
+                  <c:v>76</c:v>
+                </c:pt>
+                <c:pt idx="6">
+                  <c:v>81</c:v>
+                </c:pt>
+                <c:pt idx="7">
+                  <c:v>79</c:v>
+                </c:pt>
+                <c:pt idx="8">
+                  <c:v>71</c:v>
+                </c:pt>
+                <c:pt idx="9">
+                  <c:v>60</c:v>
+                </c:pt>
+                <c:pt idx="10">
+                  <c:v>48</c:v>
+                </c:pt>
+                <c:pt idx="11">
+                  <c:v>37</c:v>
+                </c:pt>
+              </c:numCache>
             </c:numRef>
           </c:val>
         </c:ser>
@@ -157,14 +351,100 @@
           <c:tx>
             <c:v>Los Angeles</c:v>
           </c:tx>
+          <c:spPr>
+            <a:ln w="28575">
+              <a:solidFill>
+                <a:srgbClr val="ED7D31"/>
+              </a:solidFill>
+            </a:ln>
+          </c:spPr>
           <c:cat>
             <c:strRef>
               <c:f>Sheet1!$A$2:$A$13</c:f>
+              <c:strCache>
+                <c:ptCount val="12"/>
+                <c:pt idx="0">
+                  <c:v>Jan</c:v>
+                </c:pt>
+                <c:pt idx="1">
+                  <c:v>Feb</c:v>
+                </c:pt>
+                <c:pt idx="2">
+                  <c:v>Mar</c:v>
+                </c:pt>
+                <c:pt idx="3">
+                  <c:v>Apr</c:v>
+                </c:pt>
+                <c:pt idx="4">
+                  <c:v>May</c:v>
+                </c:pt>
+                <c:pt idx="5">
+                  <c:v>Jun</c:v>
+                </c:pt>
+                <c:pt idx="6">
+                  <c:v>Jul</c:v>
+                </c:pt>
+                <c:pt idx="7">
+                  <c:v>Aug</c:v>
+                </c:pt>
+                <c:pt idx="8">
+                  <c:v>Sep</c:v>
+                </c:pt>
+                <c:pt idx="9">
+                  <c:v>Oct</c:v>
+                </c:pt>
+                <c:pt idx="10">
+                  <c:v>Nov</c:v>
+                </c:pt>
+                <c:pt idx="11">
+                  <c:v>Dec</c:v>
+                </c:pt>
+              </c:strCache>
             </c:strRef>
           </c:cat>
           <c:val>
             <c:numRef>
               <c:f>Sheet1!$C$2:$C$13</c:f>
+              <c:numCache>
+                <c:formatCode>General</c:formatCode>
+                <c:ptCount val="12"/>
+                <c:pt idx="0">
+                  <c:v>58</c:v>
+                </c:pt>
+                <c:pt idx="1">
+                  <c:v>60</c:v>
+                </c:pt>
+                <c:pt idx="2">
+                  <c:v>63</c:v>
+                </c:pt>
+                <c:pt idx="3">
+                  <c:v>66</c:v>
+                </c:pt>
+                <c:pt idx="4">
+                  <c:v>69</c:v>
+                </c:pt>
+                <c:pt idx="5">
+                  <c:v>73</c:v>
+                </c:pt>
+                <c:pt idx="6">
+                  <c:v>77</c:v>
+                </c:pt>
+                <c:pt idx="7">
+                  <c:v>78</c:v>
+                </c:pt>
+                <c:pt idx="8">
+                  <c:v>76</c:v>
+                </c:pt>
+                <c:pt idx="9">
+                  <c:v>71</c:v>
+                </c:pt>
+                <c:pt idx="10">
+                  <c:v>64</c:v>
+                </c:pt>
+                <c:pt idx="11">
+                  <c:v>59</c:v>
+                </c:pt>
+              </c:numCache>
             </c:numRef>
           </c:val>
         </c:ser>
@@ -174,14 +454,100 @@
           <c:tx>
             <c:v>Chicago</c:v>
           </c:tx>
+          <c:spPr>
+            <a:ln w="28575">
+              <a:solidFill>
+                <a:srgbClr val="A5A5A5"/>
+              </a:solidFill>
+            </a:ln>
+          </c:spPr>
           <c:cat>
             <c:strRef>
               <c:f>Sheet1!$A$2:$A$13</c:f>
+              <c:strCache>
+                <c:ptCount val="12"/>
+                <c:pt idx="0">
+                  <c:v>Jan</c:v>
+                </c:pt>
+                <c:pt idx="1">
+                  <c:v>Feb</c:v>
+                </c:pt>
+                <c:pt idx="2">
+                  <c:v>Mar</c:v>
+                </c:pt>
+                <c:pt idx="3">
+                  <c:v>Apr</c:v>
+                </c:pt>
+                <c:pt idx="4">
+                  <c:v>May</c:v>
+                </c:pt>
+                <c:pt idx="5">
+                  <c:v>Jun</c:v>
+                </c:pt>
+                <c:pt idx="6">
+                  <c:v>Jul</c:v>
+                </c:pt>
+                <c:pt idx="7">
+                  <c:v>Aug</c:v>
+                </c:pt>
+                <c:pt idx="8">
+                  <c:v>Sep</c:v>
+                </c:pt>
+                <c:pt idx="9">
+                  <c:v>Oct</c:v>
+                </c:pt>
+                <c:pt idx="10">
+                  <c:v>Nov</c:v>
+                </c:pt>
+                <c:pt idx="11">
+                  <c:v>Dec</c:v>
+                </c:pt>
+              </c:strCache>
             </c:strRef>
           </c:cat>
           <c:val>
             <c:numRef>
               <c:f>Sheet1!$D$2:$D$13</c:f>
+              <c:numCache>
+                <c:formatCode>General</c:formatCode>
+                <c:ptCount val="12"/>
+                <c:pt idx="0">
+                  <c:v>25</c:v>
+                </c:pt>
+                <c:pt idx="1">
+                  <c:v>29</c:v>
+                </c:pt>
+                <c:pt idx="2">
+                  <c:v>40</c:v>
+                </c:pt>
+                <c:pt idx="3">
+                  <c:v>52</c:v>
+                </c:pt>
+                <c:pt idx="4">
+                  <c:v>63</c:v>
+                </c:pt>
+                <c:pt idx="5">
+                  <c:v>73</c:v>
+                </c:pt>
+                <c:pt idx="6">
+                  <c:v>77</c:v>
+                </c:pt>
+                <c:pt idx="7">
+                  <c:v>76</c:v>
+                </c:pt>
+                <c:pt idx="8">
+                  <c:v>68</c:v>
+                </c:pt>
+                <c:pt idx="9">
+                  <c:v>55</c:v>
+                </c:pt>
+                <c:pt idx="10">
+                  <c:v>42</c:v>
+                </c:pt>
+                <c:pt idx="11">
+                  <c:v>30</c:v>
+                </c:pt>
+              </c:numCache>
             </c:numRef>
           </c:val>
         </c:ser>
@@ -237,13 +603,90 @@
           <c:cat>
             <c:strRef>
               <c:f>Sheet1!$A$2:$A$6</c:f>
+              <c:strCache>
+                <c:ptCount val="5"/>
+                <c:pt idx="0">
+                  <c:v>Company A</c:v>
+                </c:pt>
+                <c:pt idx="1">
+                  <c:v>Company B</c:v>
+                </c:pt>
+                <c:pt idx="2">
+                  <c:v>Company C</c:v>
+                </c:pt>
+                <c:pt idx="3">
+                  <c:v>Company D</c:v>
+                </c:pt>
+                <c:pt idx="4">
+                  <c:v>Company E</c:v>
+                </c:pt>
+              </c:strCache>
             </c:strRef>
           </c:cat>
           <c:val>
             <c:numRef>
               <c:f>Sheet1!$B$2:$B$6</c:f>
+              <c:numCache>
+                <c:formatCode>General</c:formatCode>
+                <c:ptCount val="5"/>
+                <c:pt idx="0">
+                  <c:v>30</c:v>
+                </c:pt>
+                <c:pt idx="1">
+                  <c:v>25</c:v>
+                </c:pt>
+                <c:pt idx="2">
+                  <c:v>20</c:v>
+                </c:pt>
+                <c:pt idx="3">
+                  <c:v>15</c:v>
+                </c:pt>
+                <c:pt idx="4">
+                  <c:v>10</c:v>
+                </c:pt>
+              </c:numCache>
             </c:numRef>
           </c:val>
+          <c:dPt>
+            <c:idx val="0"/>
+            <c:spPr>
+              <a:solidFill>
+                <a:srgbClr val="4472C4"/>
+              </a:solidFill>
+            </c:spPr>
+          </c:dPt>
+          <c:dPt>
+            <c:idx val="1"/>
+            <c:spPr>
+              <a:solidFill>
+                <a:srgbClr val="ED7D31"/>
+              </a:solidFill>
+            </c:spPr>
+          </c:dPt>
+          <c:dPt>
+            <c:idx val="2"/>
+            <c:spPr>
+              <a:solidFill>
+                <a:srgbClr val="A5A5A5"/>
+              </a:solidFill>
+            </c:spPr>
+          </c:dPt>
+          <c:dPt>
+            <c:idx val="3"/>
+            <c:spPr>
+              <a:solidFill>
+                <a:srgbClr val="FFC000"/>
+              </a:solidFill>
+            </c:spPr>
+          </c:dPt>
+          <c:dPt>
+            <c:idx val="4"/>
+            <c:spPr>
+              <a:solidFill>
+                <a:srgbClr val="5B9BD5"/>
+              </a:solidFill>
+            </c:spPr>
+          </c:dPt>
         </c:ser>
       </c:pieChart>
     </c:plotArea>
@@ -277,42 +720,186 @@
         <c:ser>
           <c:idx val="0"/>
           <c:order val="0"/>
+          <c:spPr>
+            <a:solidFill>
+              <a:srgbClr val="4472C4"/>
+            </a:solidFill>
+          </c:spPr>
           <c:cat>
             <c:strRef>
               <c:f>Sheet1!$A$2:$A$7</c:f>
+              <c:strCache>
+                <c:ptCount val="6"/>
+                <c:pt idx="0">
+                  <c:v>Jan</c:v>
+                </c:pt>
+                <c:pt idx="1">
+                  <c:v>Feb</c:v>
+                </c:pt>
+                <c:pt idx="2">
+                  <c:v>Mar</c:v>
+                </c:pt>
+                <c:pt idx="3">
+                  <c:v>Apr</c:v>
+                </c:pt>
+                <c:pt idx="4">
+                  <c:v>May</c:v>
+                </c:pt>
+                <c:pt idx="5">
+                  <c:v>Jun</c:v>
+                </c:pt>
+              </c:strCache>
             </c:strRef>
           </c:cat>
           <c:val>
             <c:numRef>
               <c:f>Sheet1!$B$2:$B$7</c:f>
+              <c:numCache>
+                <c:formatCode>General</c:formatCode>
+                <c:ptCount val="6"/>
+                <c:pt idx="0">
+                  <c:v>100</c:v>
+                </c:pt>
+                <c:pt idx="1">
+                  <c:v>120</c:v>
+                </c:pt>
+                <c:pt idx="2">
+                  <c:v>140</c:v>
+                </c:pt>
+                <c:pt idx="3">
+                  <c:v>160</c:v>
+                </c:pt>
+                <c:pt idx="4">
+                  <c:v>180</c:v>
+                </c:pt>
+                <c:pt idx="5">
+                  <c:v>200</c:v>
+                </c:pt>
+              </c:numCache>
             </c:numRef>
           </c:val>
         </c:ser>
         <c:ser>
           <c:idx val="1"/>
           <c:order val="1"/>
+          <c:spPr>
+            <a:solidFill>
+              <a:srgbClr val="ED7D31"/>
+            </a:solidFill>
+          </c:spPr>
           <c:cat>
             <c:strRef>
               <c:f>Sheet1!$A$2:$A$7</c:f>
+              <c:strCache>
+                <c:ptCount val="6"/>
+                <c:pt idx="0">
+                  <c:v>Jan</c:v>
+                </c:pt>
+                <c:pt idx="1">
+                  <c:v>Feb</c:v>
+                </c:pt>
+                <c:pt idx="2">
+                  <c:v>Mar</c:v>
+                </c:pt>
+                <c:pt idx="3">
+                  <c:v>Apr</c:v>
+                </c:pt>
+                <c:pt idx="4">
+                  <c:v>May</c:v>
+                </c:pt>
+                <c:pt idx="5">
+                  <c:v>Jun</c:v>
+                </c:pt>
+              </c:strCache>
             </c:strRef>
           </c:cat>
           <c:val>
             <c:numRef>
               <c:f>Sheet1!$C$2:$C$7</c:f>
+              <c:numCache>
+                <c:formatCode>General</c:formatCode>
+                <c:ptCount val="6"/>
+                <c:pt idx="0">
+                  <c:v>80</c:v>
+                </c:pt>
+                <c:pt idx="1">
+                  <c:v>95</c:v>
+                </c:pt>
+                <c:pt idx="2">
+                  <c:v>110</c:v>
+                </c:pt>
+                <c:pt idx="3">
+                  <c:v>125</c:v>
+                </c:pt>
+                <c:pt idx="4">
+                  <c:v>140</c:v>
+                </c:pt>
+                <c:pt idx="5">
+                  <c:v>155</c:v>
+                </c:pt>
+              </c:numCache>
             </c:numRef>
           </c:val>
         </c:ser>
         <c:ser>
           <c:idx val="2"/>
           <c:order val="2"/>
+          <c:spPr>
+            <a:solidFill>
+              <a:srgbClr val="A5A5A5"/>
+            </a:solidFill>
+          </c:spPr>
           <c:cat>
             <c:strRef>
               <c:f>Sheet1!$A$2:$A$7</c:f>
+              <c:strCache>
+                <c:ptCount val="6"/>
+                <c:pt idx="0">
+                  <c:v>Jan</c:v>
+                </c:pt>
+                <c:pt idx="1">
+                  <c:v>Feb</c:v>
+                </c:pt>
+                <c:pt idx="2">
+                  <c:v>Mar</c:v>
+                </c:pt>
+                <c:pt idx="3">
+                  <c:v>Apr</c:v>
+                </c:pt>
+                <c:pt idx="4">
+                  <c:v>May</c:v>
+                </c:pt>
+                <c:pt idx="5">
+                  <c:v>Jun</c:v>
+                </c:pt>
+              </c:strCache>
             </c:strRef>
           </c:cat>
           <c:val>
             <c:numRef>
               <c:f>Sheet1!$D$2:$D$7</c:f>
+              <c:numCache>
+                <c:formatCode>General</c:formatCode>
+                <c:ptCount val="6"/>
+                <c:pt idx="0">
+                  <c:v>60</c:v>
+                </c:pt>
+                <c:pt idx="1">
+                  <c:v>70</c:v>
+                </c:pt>
+                <c:pt idx="2">
+                  <c:v>80</c:v>
+                </c:pt>
+                <c:pt idx="3">
+                  <c:v>90</c:v>
+                </c:pt>
+                <c:pt idx="4">
+                  <c:v>100</c:v>
+                </c:pt>
+                <c:pt idx="5">
+                  <c:v>110</c:v>
+                </c:pt>
+              </c:numCache>
             </c:numRef>
           </c:val>
         </c:ser>
@@ -366,28 +953,174 @@
         <c:ser>
           <c:idx val="0"/>
           <c:order val="0"/>
+          <c:spPr>
+            <a:solidFill>
+              <a:srgbClr val="4472C4"/>
+            </a:solidFill>
+          </c:spPr>
           <c:xVal>
             <c:numRef>
               <c:f>Sheet1!$A$2:$A$11</c:f>
+              <c:numCache>
+                <c:formatCode>General</c:formatCode>
+                <c:ptCount val="10"/>
+                <c:pt idx="0">
+                  <c:v>10</c:v>
+                </c:pt>
+                <c:pt idx="1">
+                  <c:v>15</c:v>
+                </c:pt>
+                <c:pt idx="2">
+                  <c:v>20</c:v>
+                </c:pt>
+                <c:pt idx="3">
+                  <c:v>25</c:v>
+                </c:pt>
+                <c:pt idx="4">
+                  <c:v>30</c:v>
+                </c:pt>
+                <c:pt idx="5">
+                  <c:v>35</c:v>
+                </c:pt>
+                <c:pt idx="6">
+                  <c:v>40</c:v>
+                </c:pt>
+                <c:pt idx="7">
+                  <c:v>45</c:v>
+                </c:pt>
+                <c:pt idx="8">
+                  <c:v>50</c:v>
+                </c:pt>
+                <c:pt idx="9">
+                  <c:v>55</c:v>
+                </c:pt>
+              </c:numCache>
             </c:numRef>
           </c:xVal>
           <c:yVal>
             <c:numRef>
               <c:f>Sheet1!$B$2:$B$11</c:f>
+              <c:numCache>
+                <c:formatCode>General</c:formatCode>
+                <c:ptCount val="10"/>
+                <c:pt idx="0">
+                  <c:v>100</c:v>
+                </c:pt>
+                <c:pt idx="1">
+                  <c:v>95</c:v>
+                </c:pt>
+                <c:pt idx="2">
+                  <c:v>85</c:v>
+                </c:pt>
+                <c:pt idx="3">
+                  <c:v>75</c:v>
+                </c:pt>
+                <c:pt idx="4">
+                  <c:v>65</c:v>
+                </c:pt>
+                <c:pt idx="5">
+                  <c:v>55</c:v>
+                </c:pt>
+                <c:pt idx="6">
+                  <c:v>45</c:v>
+                </c:pt>
+                <c:pt idx="7">
+                  <c:v>35</c:v>
+                </c:pt>
+                <c:pt idx="8">
+                  <c:v>25</c:v>
+                </c:pt>
+                <c:pt idx="9">
+                  <c:v>20</c:v>
+                </c:pt>
+              </c:numCache>
             </c:numRef>
           </c:yVal>
         </c:ser>
         <c:ser>
           <c:idx val="1"/>
           <c:order val="1"/>
+          <c:spPr>
+            <a:solidFill>
+              <a:srgbClr val="ED7D31"/>
+            </a:solidFill>
+          </c:spPr>
           <c:xVal>
             <c:numRef>
               <c:f>Sheet1!$A$2:$A$11</c:f>
+              <c:numCache>
+                <c:formatCode>General</c:formatCode>
+                <c:ptCount val="10"/>
+                <c:pt idx="0">
+                  <c:v>10</c:v>
+                </c:pt>
+                <c:pt idx="1">
+                  <c:v>15</c:v>
+                </c:pt>
+                <c:pt idx="2">
+                  <c:v>20</c:v>
+                </c:pt>
+                <c:pt idx="3">
+                  <c:v>25</c:v>
+                </c:pt>
+                <c:pt idx="4">
+                  <c:v>30</c:v>
+                </c:pt>
+                <c:pt idx="5">
+                  <c:v>35</c:v>
+                </c:pt>
+                <c:pt idx="6">
+                  <c:v>40</c:v>
+                </c:pt>
+                <c:pt idx="7">
+                  <c:v>45</c:v>
+                </c:pt>
+                <c:pt idx="8">
+                  <c:v>50</c:v>
+                </c:pt>
+                <c:pt idx="9">
+                  <c:v>55</c:v>
+                </c:pt>
+              </c:numCache>
             </c:numRef>
           </c:xVal>
           <c:yVal>
             <c:numRef>
               <c:f>Sheet1!$C$2:$C$11</c:f>
+              <c:numCache>
+                <c:formatCode>General</c:formatCode>
+                <c:ptCount val="10"/>
+                <c:pt idx="0">
+                  <c:v>90</c:v>
+                </c:pt>
+                <c:pt idx="1">
+                  <c:v>85</c:v>
+                </c:pt>
+                <c:pt idx="2">
+                  <c:v>78</c:v>
+                </c:pt>
+                <c:pt idx="3">
+                  <c:v>70</c:v>
+                </c:pt>
+                <c:pt idx="4">
+                  <c:v>62</c:v>
+                </c:pt>
+                <c:pt idx="5">
+                  <c:v>54</c:v>
+                </c:pt>
+                <c:pt idx="6">
+                  <c:v>46</c:v>
+                </c:pt>
+                <c:pt idx="7">
+                  <c:v>38</c:v>
+                </c:pt>
+                <c:pt idx="8">
+                  <c:v>30</c:v>
+                </c:pt>
+                <c:pt idx="9">
+                  <c:v>25</c:v>
+                </c:pt>
+              </c:numCache>
             </c:numRef>
           </c:yVal>
         </c:ser>
@@ -444,13 +1177,104 @@
           <c:cat>
             <c:strRef>
               <c:f>Sheet1!$A$2:$A$7</c:f>
+              <c:strCache>
+                <c:ptCount val="6"/>
+                <c:pt idx="0">
+                  <c:v>Engineering</c:v>
+                </c:pt>
+                <c:pt idx="1">
+                  <c:v>Marketing</c:v>
+                </c:pt>
+                <c:pt idx="2">
+                  <c:v>Sales</c:v>
+                </c:pt>
+                <c:pt idx="3">
+                  <c:v>Operations</c:v>
+                </c:pt>
+                <c:pt idx="4">
+                  <c:v>HR</c:v>
+                </c:pt>
+                <c:pt idx="5">
+                  <c:v>R&amp;D</c:v>
+                </c:pt>
+              </c:strCache>
             </c:strRef>
           </c:cat>
           <c:val>
             <c:numRef>
               <c:f>Sheet1!$B$2:$B$7</c:f>
+              <c:numCache>
+                <c:formatCode>General</c:formatCode>
+                <c:ptCount val="6"/>
+                <c:pt idx="0">
+                  <c:v>35</c:v>
+                </c:pt>
+                <c:pt idx="1">
+                  <c:v>20</c:v>
+                </c:pt>
+                <c:pt idx="2">
+                  <c:v>18</c:v>
+                </c:pt>
+                <c:pt idx="3">
+                  <c:v>12</c:v>
+                </c:pt>
+                <c:pt idx="4">
+                  <c:v>8</c:v>
+                </c:pt>
+                <c:pt idx="5">
+                  <c:v>7</c:v>
+                </c:pt>
+              </c:numCache>
             </c:numRef>
           </c:val>
+          <c:dPt>
+            <c:idx val="0"/>
+            <c:spPr>
+              <a:solidFill>
+                <a:srgbClr val="4472C4"/>
+              </a:solidFill>
+            </c:spPr>
+          </c:dPt>
+          <c:dPt>
+            <c:idx val="1"/>
+            <c:spPr>
+              <a:solidFill>
+                <a:srgbClr val="ED7D31"/>
+              </a:solidFill>
+            </c:spPr>
+          </c:dPt>
+          <c:dPt>
+            <c:idx val="2"/>
+            <c:spPr>
+              <a:solidFill>
+                <a:srgbClr val="A5A5A5"/>
+              </a:solidFill>
+            </c:spPr>
+          </c:dPt>
+          <c:dPt>
+            <c:idx val="3"/>
+            <c:spPr>
+              <a:solidFill>
+                <a:srgbClr val="FFC000"/>
+              </a:solidFill>
+            </c:spPr>
+          </c:dPt>
+          <c:dPt>
+            <c:idx val="4"/>
+            <c:spPr>
+              <a:solidFill>
+                <a:srgbClr val="5B9BD5"/>
+              </a:solidFill>
+            </c:spPr>
+          </c:dPt>
+          <c:dPt>
+            <c:idx val="5"/>
+            <c:spPr>
+              <a:solidFill>
+                <a:srgbClr val="70AD47"/>
+              </a:solidFill>
+            </c:spPr>
+          </c:dPt>
         </c:ser>
       </c:doughnutChart>
     </c:plotArea>
@@ -461,26 +1285,320 @@
 </c:chartSpace>
 </file>
 
-<file path=ppt/slides/slide1.xml><?xml version="1.0" encoding="UTF-8" standalone="yes"?>
-<p:sld xmlns:p="http://schemas.openxmlformats.org/presentationml/2006/main"><p:cSld><p:spTree><p:nvGrpSpPr><p:cNvPr id="1" name=""/><p:cNvGrpSpPr/><p:nvPr/></p:nvGrpSpPr><p:grpSpPr/><p:sp><p:nvSpPr><p:cNvPr id="1" name="Shape 1"/><p:cNvSpPr/><p:nvPr/></p:nvSpPr><a:spPr><a:xfrm><a:off x="914400" y="365125"/><a:ext cx="7315200" cy="914400"/></a:xfrm></a:spPr><a:txBody><a:bodyPr/></a:txBody><a:txBody><a:bodyPr/><a:p><a:r><a:t/></a:r><a:r><a:rPr sz="2800"/><a:t/></a:r></a:p></a:txBody></p:sp><p:graphicFrame><p:nvGraphicFramePr><p:cNvPr id="1" name="Graphic Frame"/><p:cNvGraphicFramePr/><p:nvPr/></p:nvGraphicFramePr><p:xfrm><a:off x="1524000" y="1828800"/><a:ext cx="6096000" cy="4572000"/></p:xfrm><a:graphic><a:graphicData uri="http://schemas.openxmlformats.org/drawingml/2006/chart"><c:chart xmlns:r="http://schemas.openxmlformats.org/officeDocument/2006/relationships" r:id="rId1"/></a:graphicData></a:graphic></p:graphicFrame></p:spTree></p:cSld></p:sld>
+<file path=ppt/slides/slide1.xml><?xml version="1.0" encoding="utf-8"?>
+<p:sld xmlns:p="http://schemas.openxmlformats.org/presentationml/2006/main" xmlns:a="http://schemas.openxmlformats.org/drawingml/2006/main" xmlns:r="http://schemas.openxmlformats.org/officeDocument/2006/relationships" xmlns:c="http://schemas.openxmlformats.org/drawingml/2006/chart">
+  <p:cSld>
+    <p:spTree>
+      <p:nvGrpSpPr>
+        <p:cNvPr id="1" name=""/>
+        <p:cNvGrpSpPr/>
+        <p:nvPr/>
+      </p:nvGrpSpPr>
+      <p:grpSpPr/>
+      <p:sp>
+        <p:nvSpPr>
+          <p:cNvPr id="1" name="Shape 1"/>
+          <p:cNvSpPr/>
+          <p:nvPr/>
+        </p:nvSpPr>
+        <a:spPr>
+          <a:xfrm>
+            <a:off x="914400" y="365125"/>
+            <a:ext cx="7315200" cy="914400"/>
+          </a:xfrm>
+        </a:spPr>
+        <p:txBody>
+          <a:bodyPr/>
+          <a:p>
+            <a:r>
+              <a:rPr sz="2800"/>
+              <a:t>Quarterly Sales Comparison</a:t>
+            </a:r>
+          </a:p>
+        </p:txBody>
+      </p:sp>
+      <p:graphicFrame>
+        <p:nvGraphicFramePr>
+          <p:cNvPr id="1" name="Graphic Frame"/>
+          <p:cNvGraphicFramePr/>
+          <p:nvPr/>
+        </p:nvGraphicFramePr>
+        <p:xfrm>
+          <a:off x="1524000" y="1828800"/>
+          <a:ext cx="6096000" cy="4572000"/>
+        </p:xfrm>
+        <a:graphic>
+          <a:graphicData uri="http://schemas.openxmlformats.org/drawingml/2006/chart">
+            <c:chart xmlns:r="http://schemas.openxmlformats.org/officeDocument/2006/relationships" r:id="rId1"/>
+          </a:graphicData>
+        </a:graphic>
+      </p:graphicFrame>
+    </p:spTree>
+  </p:cSld>
+</p:sld>
 </file>
 
-<file path=ppt/slides/slide2.xml><?xml version="1.0" encoding="UTF-8" standalone="yes"?>
-<p:sld xmlns:p="http://schemas.openxmlformats.org/presentationml/2006/main"><p:cSld><p:spTree><p:nvGrpSpPr><p:cNvPr id="1" name=""/><p:cNvGrpSpPr/><p:nvPr/></p:nvGrpSpPr><p:grpSpPr/><p:sp><p:nvSpPr><p:cNvPr id="2" name="Shape 2"/><p:cNvSpPr/><p:nvPr/></p:nvSpPr><a:spPr><a:xfrm><a:off x="914400" y="365125"/><a:ext cx="7315200" cy="914400"/></a:xfrm></a:spPr><a:txBody><a:bodyPr/></a:txBody><a:txBody><a:bodyPr/><a:p><a:r><a:t/></a:r><a:r><a:rPr sz="2800"/><a:t/></a:r></a:p></a:txBody></p:sp><p:graphicFrame><p:nvGraphicFramePr><p:cNvPr id="1" name="Graphic Frame"/><p:cNvGraphicFramePr/><p:nvPr/></p:nvGraphicFramePr><p:xfrm><a:off x="1524000" y="1828800"/><a:ext cx="6096000" cy="4572000"/></p:xfrm><a:graphic><a:graphicData uri="http://schemas.openxmlformats.org/drawingml/2006/chart"><c:chart xmlns:r="http://schemas.openxmlformats.org/officeDocument/2006/relationships" r:id="rId1"/></a:graphicData></a:graphic></p:graphicFrame></p:spTree></p:cSld></p:sld>
+<file path=ppt/slides/slide2.xml><?xml version="1.0" encoding="utf-8"?>
+<p:sld xmlns:p="http://schemas.openxmlformats.org/presentationml/2006/main" xmlns:a="http://schemas.openxmlformats.org/drawingml/2006/main" xmlns:r="http://schemas.openxmlformats.org/officeDocument/2006/relationships" xmlns:c="http://schemas.openxmlformats.org/drawingml/2006/chart">
+  <p:cSld>
+    <p:spTree>
+      <p:nvGrpSpPr>
+        <p:cNvPr id="1" name=""/>
+        <p:cNvGrpSpPr/>
+        <p:nvPr/>
+      </p:nvGrpSpPr>
+      <p:grpSpPr/>
+      <p:sp>
+        <p:nvSpPr>
+          <p:cNvPr id="2" name="Shape 2"/>
+          <p:cNvSpPr/>
+          <p:nvPr/>
+        </p:nvSpPr>
+        <a:spPr>
+          <a:xfrm>
+            <a:off x="914400" y="365125"/>
+            <a:ext cx="7315200" cy="914400"/>
+          </a:xfrm>
+        </a:spPr>
+        <p:txBody>
+          <a:bodyPr/>
+          <a:p>
+            <a:r>
+              <a:rPr sz="2800"/>
+              <a:t>Monthly Temperature Trends</a:t>
+            </a:r>
+          </a:p>
+        </p:txBody>
+      </p:sp>
+      <p:graphicFrame>
+        <p:nvGraphicFramePr>
+          <p:cNvPr id="1" name="Graphic Frame"/>
+          <p:cNvGraphicFramePr/>
+          <p:nvPr/>
+        </p:nvGraphicFramePr>
+        <p:xfrm>
+          <a:off x="1524000" y="1828800"/>
+          <a:ext cx="6096000" cy="4572000"/>
+        </p:xfrm>
+        <a:graphic>
+          <a:graphicData uri="http://schemas.openxmlformats.org/drawingml/2006/chart">
+            <c:chart xmlns:r="http://schemas.openxmlformats.org/officeDocument/2006/relationships" r:id="rId1"/>
+          </a:graphicData>
+        </a:graphic>
+      </p:graphicFrame>
+    </p:spTree>
+  </p:cSld>
+</p:sld>
 </file>
 
-<file path=ppt/slides/slide3.xml><?xml version="1.0" encoding="UTF-8" standalone="yes"?>
-<p:sld xmlns:p="http://schemas.openxmlformats.org/presentationml/2006/main"><p:cSld><p:spTree><p:nvGrpSpPr><p:cNvPr id="1" name=""/><p:cNvGrpSpPr/><p:nvPr/></p:nvGrpSpPr><p:grpSpPr/><p:sp><p:nvSpPr><p:cNvPr id="3" name="Shape 3"/><p:cNvSpPr/><p:nvPr/></p:nvSpPr><a:spPr><a:xfrm><a:off x="914400" y="365125"/><a:ext cx="7315200" cy="914400"/></a:xfrm></a:spPr><a:txBody><a:bodyPr/></a:txBody><a:txBody><a:bodyPr/><a:p><a:r><a:t/></a:r><a:r><a:rPr sz="2800"/><a:t/></a:r></a:p></a:txBody></p:sp><p:graphicFrame><p:nvGraphicFramePr><p:cNvPr id="1" name="Graphic Frame"/><p:cNvGraphicFramePr/><p:nvPr/></p:nvGraphicFramePr><p:xfrm><a:off x="1524000" y="1828800"/><a:ext cx="6096000" cy="4572000"/></p:xfrm><a:graphic><a:graphicData uri="http://schemas.openxmlformats.org/drawingml/2006/chart"><c:chart xmlns:r="http://schemas.openxmlformats.org/officeDocument/2006/relationships" r:id="rId1"/></a:graphicData></a:graphic></p:graphicFrame></p:spTree></p:cSld></p:sld>
+<file path=ppt/slides/slide3.xml><?xml version="1.0" encoding="utf-8"?>
+<p:sld xmlns:p="http://schemas.openxmlformats.org/presentationml/2006/main" xmlns:a="http://schemas.openxmlformats.org/drawingml/2006/main" xmlns:r="http://schemas.openxmlformats.org/officeDocument/2006/relationships" xmlns:c="http://schemas.openxmlformats.org/drawingml/2006/chart">
+  <p:cSld>
+    <p:spTree>
+      <p:nvGrpSpPr>
+        <p:cNvPr id="1" name=""/>
+        <p:cNvGrpSpPr/>
+        <p:nvPr/>
+      </p:nvGrpSpPr>
+      <p:grpSpPr/>
+      <p:sp>
+        <p:nvSpPr>
+          <p:cNvPr id="3" name="Shape 3"/>
+          <p:cNvSpPr/>
+          <p:nvPr/>
+        </p:nvSpPr>
+        <a:spPr>
+          <a:xfrm>
+            <a:off x="914400" y="365125"/>
+            <a:ext cx="7315200" cy="914400"/>
+          </a:xfrm>
+        </a:spPr>
+        <p:txBody>
+          <a:bodyPr/>
+          <a:p>
+            <a:r>
+              <a:rPr sz="2800"/>
+              <a:t>Market Share Distribution</a:t>
+            </a:r>
+          </a:p>
+        </p:txBody>
+      </p:sp>
+      <p:graphicFrame>
+        <p:nvGraphicFramePr>
+          <p:cNvPr id="1" name="Graphic Frame"/>
+          <p:cNvGraphicFramePr/>
+          <p:nvPr/>
+        </p:nvGraphicFramePr>
+        <p:xfrm>
+          <a:off x="1524000" y="1828800"/>
+          <a:ext cx="6096000" cy="4572000"/>
+        </p:xfrm>
+        <a:graphic>
+          <a:graphicData uri="http://schemas.openxmlformats.org/drawingml/2006/chart">
+            <c:chart xmlns:r="http://schemas.openxmlformats.org/officeDocument/2006/relationships" r:id="rId1"/>
+          </a:graphicData>
+        </a:graphic>
+      </p:graphicFrame>
+    </p:spTree>
+  </p:cSld>
+</p:sld>
 </file>
 
-<file path=ppt/slides/slide4.xml><?xml version="1.0" encoding="UTF-8" standalone="yes"?>
-<p:sld xmlns:p="http://schemas.openxmlformats.org/presentationml/2006/main"><p:cSld><p:spTree><p:nvGrpSpPr><p:cNvPr id="1" name=""/><p:cNvGrpSpPr/><p:nvPr/></p:nvGrpSpPr><p:grpSpPr/><p:sp><p:nvSpPr><p:cNvPr id="4" name="Shape 4"/><p:cNvSpPr/><p:nvPr/></p:nvSpPr><a:spPr><a:xfrm><a:off x="914400" y="365125"/><a:ext cx="7315200" cy="914400"/></a:xfrm></a:spPr><a:txBody><a:bodyPr/></a:txBody><a:txBody><a:bodyPr/><a:p><a:r><a:t/></a:r><a:r><a:rPr sz="2800"/><a:t/></a:r></a:p></a:txBody></p:sp><p:graphicFrame><p:nvGraphicFramePr><p:cNvPr id="1" name="Graphic Frame"/><p:cNvGraphicFramePr/><p:nvPr/></p:nvGraphicFramePr><p:xfrm><a:off x="1524000" y="1828800"/><a:ext cx="6096000" cy="4572000"/></p:xfrm><a:graphic><a:graphicData uri="http://schemas.openxmlformats.org/drawingml/2006/chart"><c:chart xmlns:r="http://schemas.openxmlformats.org/officeDocument/2006/relationships" r:id="rId1"/></a:graphicData></a:graphic></p:graphicFrame></p:spTree></p:cSld></p:sld>
+<file path=ppt/slides/slide4.xml><?xml version="1.0" encoding="utf-8"?>
+<p:sld xmlns:p="http://schemas.openxmlformats.org/presentationml/2006/main" xmlns:a="http://schemas.openxmlformats.org/drawingml/2006/main" xmlns:r="http://schemas.openxmlformats.org/officeDocument/2006/relationships" xmlns:c="http://schemas.openxmlformats.org/drawingml/2006/chart">
+  <p:cSld>
+    <p:spTree>
+      <p:nvGrpSpPr>
+        <p:cNvPr id="1" name=""/>
+        <p:cNvGrpSpPr/>
+        <p:nvPr/>
+      </p:nvGrpSpPr>
+      <p:grpSpPr/>
+      <p:sp>
+        <p:nvSpPr>
+          <p:cNvPr id="4" name="Shape 4"/>
+          <p:cNvSpPr/>
+          <p:nvPr/>
+        </p:nvSpPr>
+        <a:spPr>
+          <a:xfrm>
+            <a:off x="914400" y="365125"/>
+            <a:ext cx="7315200" cy="914400"/>
+          </a:xfrm>
+        </a:spPr>
+        <p:txBody>
+          <a:bodyPr/>
+          <a:p>
+            <a:r>
+              <a:rPr sz="2800"/>
+              <a:t>Cumulative Revenue Growth</a:t>
+            </a:r>
+          </a:p>
+        </p:txBody>
+      </p:sp>
+      <p:graphicFrame>
+        <p:nvGraphicFramePr>
+          <p:cNvPr id="1" name="Graphic Frame"/>
+          <p:cNvGraphicFramePr/>
+          <p:nvPr/>
+        </p:nvGraphicFramePr>
+        <p:xfrm>
+          <a:off x="1524000" y="1828800"/>
+          <a:ext cx="6096000" cy="4572000"/>
+        </p:xfrm>
+        <a:graphic>
+          <a:graphicData uri="http://schemas.openxmlformats.org/drawingml/2006/chart">
+            <c:chart xmlns:r="http://schemas.openxmlformats.org/officeDocument/2006/relationships" r:id="rId1"/>
+          </a:graphicData>
+        </a:graphic>
+      </p:graphicFrame>
+    </p:spTree>
+  </p:cSld>
+</p:sld>
 </file>
 
-<file path=ppt/slides/slide5.xml><?xml version="1.0" encoding="UTF-8" standalone="yes"?>
-<p:sld xmlns:p="http://schemas.openxmlformats.org/presentationml/2006/main"><p:cSld><p:spTree><p:nvGrpSpPr><p:cNvPr id="1" name=""/><p:cNvGrpSpPr/><p:nvPr/></p:nvGrpSpPr><p:grpSpPr/><p:sp><p:nvSpPr><p:cNvPr id="5" name="Shape 5"/><p:cNvSpPr/><p:nvPr/></p:nvSpPr><a:spPr><a:xfrm><a:off x="914400" y="365125"/><a:ext cx="7315200" cy="914400"/></a:xfrm></a:spPr><a:txBody><a:bodyPr/></a:txBody><a:txBody><a:bodyPr/><a:p><a:r><a:t/></a:r><a:r><a:rPr sz="2800"/><a:t/></a:r></a:p></a:txBody></p:sp><p:graphicFrame><p:nvGraphicFramePr><p:cNvPr id="1" name="Graphic Frame"/><p:cNvGraphicFramePr/><p:nvPr/></p:nvGraphicFramePr><p:xfrm><a:off x="1524000" y="1828800"/><a:ext cx="6096000" cy="4572000"/></p:xfrm><a:graphic><a:graphicData uri="http://schemas.openxmlformats.org/drawingml/2006/chart"><c:chart xmlns:r="http://schemas.openxmlformats.org/officeDocument/2006/relationships" r:id="rId1"/></a:graphicData></a:graphic></p:graphicFrame></p:spTree></p:cSld></p:sld>
+<file path=ppt/slides/slide5.xml><?xml version="1.0" encoding="utf-8"?>
+<p:sld xmlns:p="http://schemas.openxmlformats.org/presentationml/2006/main" xmlns:a="http://schemas.openxmlformats.org/drawingml/2006/main" xmlns:r="http://schemas.openxmlformats.org/officeDocument/2006/relationships" xmlns:c="http://schemas.openxmlformats.org/drawingml/2006/chart">
+  <p:cSld>
+    <p:spTree>
+      <p:nvGrpSpPr>
+        <p:cNvPr id="1" name=""/>
+        <p:cNvGrpSpPr/>
+        <p:nvPr/>
+      </p:nvGrpSpPr>
+      <p:grpSpPr/>
+      <p:sp>
+        <p:nvSpPr>
+          <p:cNvPr id="5" name="Shape 5"/>
+          <p:cNvSpPr/>
+          <p:nvPr/>
+        </p:nvSpPr>
+        <a:spPr>
+          <a:xfrm>
+            <a:off x="914400" y="365125"/>
+            <a:ext cx="7315200" cy="914400"/>
+          </a:xfrm>
+        </a:spPr>
+        <p:txBody>
+          <a:bodyPr/>
+          <a:p>
+            <a:r>
+              <a:rPr sz="2800"/>
+              <a:t>Price vs Demand Analysis</a:t>
+            </a:r>
+          </a:p>
+        </p:txBody>
+      </p:sp>
+      <p:graphicFrame>
+        <p:nvGraphicFramePr>
+          <p:cNvPr id="1" name="Graphic Frame"/>
+          <p:cNvGraphicFramePr/>
+          <p:nvPr/>
+        </p:nvGraphicFramePr>
+        <p:xfrm>
+          <a:off x="1524000" y="1828800"/>
+          <a:ext cx="6096000" cy="4572000"/>
+        </p:xfrm>
+        <a:graphic>
+          <a:graphicData uri="http://schemas.openxmlformats.org/drawingml/2006/chart">
+            <c:chart xmlns:r="http://schemas.openxmlformats.org/officeDocument/2006/relationships" r:id="rId1"/>
+          </a:graphicData>
+        </a:graphic>
+      </p:graphicFrame>
+    </p:spTree>
+  </p:cSld>
+</p:sld>
 </file>
 
-<file path=ppt/slides/slide6.xml><?xml version="1.0" encoding="UTF-8" standalone="yes"?>
-<p:sld xmlns:p="http://schemas.openxmlformats.org/presentationml/2006/main"><p:cSld><p:spTree><p:nvGrpSpPr><p:cNvPr id="1" name=""/><p:cNvGrpSpPr/><p:nvPr/></p:nvGrpSpPr><p:grpSpPr/><p:sp><p:nvSpPr><p:cNvPr id="6" name="Shape 6"/><p:cNvSpPr/><p:nvPr/></p:nvSpPr><a:spPr><a:xfrm><a:off x="914400" y="365125"/><a:ext cx="7315200" cy="914400"/></a:xfrm></a:spPr><a:txBody><a:bodyPr/></a:txBody><a:txBody><a:bodyPr/><a:p><a:r><a:t/></a:r><a:r><a:rPr sz="2800"/><a:t/></a:r></a:p></a:txBody></p:sp><p:graphicFrame><p:nvGraphicFramePr><p:cNvPr id="1" name="Graphic Frame"/><p:cNvGraphicFramePr/><p:nvPr/></p:nvGraphicFramePr><p:xfrm><a:off x="1524000" y="1828800"/><a:ext cx="6096000" cy="4572000"/></p:xfrm><a:graphic><a:graphicData uri="http://schemas.openxmlformats.org/drawingml/2006/chart"><c:chart xmlns:r="http://schemas.openxmlformats.org/officeDocument/2006/relationships" r:id="rId1"/></a:graphicData></a:graphic></p:graphicFrame></p:spTree></p:cSld></p:sld>
+<file path=ppt/slides/slide6.xml><?xml version="1.0" encoding="utf-8"?>
+<p:sld xmlns:p="http://schemas.openxmlformats.org/presentationml/2006/main" xmlns:a="http://schemas.openxmlformats.org/drawingml/2006/main" xmlns:r="http://schemas.openxmlformats.org/officeDocument/2006/relationships" xmlns:c="http://schemas.openxmlformats.org/drawingml/2006/chart">
+  <p:cSld>
+    <p:spTree>
+      <p:nvGrpSpPr>
+        <p:cNvPr id="1" name=""/>
+        <p:cNvGrpSpPr/>
+        <p:nvPr/>
+      </p:nvGrpSpPr>
+      <p:grpSpPr/>
+      <p:sp>
+        <p:nvSpPr>
+          <p:cNvPr id="6" name="Shape 6"/>
+          <p:cNvSpPr/>
+          <p:nvPr/>
+        </p:nvSpPr>
+        <a:spPr>
+          <a:xfrm>
+            <a:off x="914400" y="365125"/>
+            <a:ext cx="7315200" cy="914400"/>
+          </a:xfrm>
+        </a:spPr>
+        <p:txBody>
+          <a:bodyPr/>
+          <a:p>
+            <a:r>
+              <a:rPr sz="2800"/>
+              <a:t>Annual Budget Allocation</a:t>
+            </a:r>
+          </a:p>
+        </p:txBody>
+      </p:sp>
+      <p:graphicFrame>
+        <p:nvGraphicFramePr>
+          <p:cNvPr id="1" name="Graphic Frame"/>
+          <p:cNvGraphicFramePr/>
+          <p:nvPr/>
+        </p:nvGraphicFramePr>
+        <p:xfrm>
+          <a:off x="1524000" y="1828800"/>
+          <a:ext cx="6096000" cy="4572000"/>
+        </p:xfrm>
+        <a:graphic>
+          <a:graphicData uri="http://schemas.openxmlformats.org/drawingml/2006/chart">
+            <c:chart xmlns:r="http://schemas.openxmlformats.org/officeDocument/2006/relationships" r:id="rId1"/>
+          </a:graphicData>
+        </a:graphic>
+      </p:graphicFrame>
+    </p:spTree>
+  </p:cSld>
+</p:sld>
 </file>